--- a/日常/2026-09-29/NO.2澳门攻略_10.4.pptx
+++ b/日常/2026-09-29/NO.2澳门攻略_10.4.pptx
@@ -3095,12 +3095,20 @@
         <p:nvPr/>
       </p:nvGrpSpPr>
       <p:grpSpPr/>
-      <p:sp>
-        <p:nvSpPr>
-          <p:cNvPr id="2" name="Rectangle 1"/>
-          <p:cNvSpPr/>
-          <p:nvPr/>
-        </p:nvSpPr>
+      <p:pic>
+        <p:nvPicPr>
+          <p:cNvPr id="2" name="Picture 1" descr="cover_macau_1790679842.png"/>
+          <p:cNvPicPr>
+            <a:picLocks noChangeAspect="1"/>
+          </p:cNvPicPr>
+          <p:nvPr/>
+        </p:nvPicPr>
+        <p:blipFill>
+          <a:blip r:embed="rId2"/>
+          <a:stretch>
+            <a:fillRect/>
+          </a:stretch>
+        </p:blipFill>
         <p:spPr>
           <a:xfrm>
             <a:off x="0" y="0"/>
@@ -3109,36 +3117,8 @@
           <a:prstGeom prst="rect">
             <a:avLst/>
           </a:prstGeom>
-          <a:solidFill>
-            <a:srgbClr val="142340"/>
-          </a:solidFill>
-          <a:ln>
-            <a:noFill/>
-          </a:ln>
-          <a:effectLst/>
-        </p:spPr>
-        <p:style>
-          <a:lnRef idx="1">
-            <a:schemeClr val="accent1"/>
-          </a:lnRef>
-          <a:fillRef idx="3">
-            <a:schemeClr val="accent1"/>
-          </a:fillRef>
-          <a:effectRef idx="2">
-            <a:schemeClr val="accent1"/>
-          </a:effectRef>
-          <a:fontRef idx="minor">
-            <a:schemeClr val="lt1"/>
-          </a:fontRef>
-        </p:style>
-        <p:txBody>
-          <a:bodyPr rtlCol="0" anchor="ctr"/>
-          <a:lstStyle/>
-          <a:p>
-            <a:pPr algn="ctr"/>
-          </a:p>
-        </p:txBody>
-      </p:sp>
+        </p:spPr>
+      </p:pic>
       <p:sp>
         <p:nvSpPr>
           <p:cNvPr id="3" name="Rectangle 2"/>
@@ -3148,14 +3128,26 @@
         <p:spPr>
           <a:xfrm>
             <a:off x="0" y="0"/>
-            <a:ext cx="7498079" cy="6858000"/>
-          </a:xfrm>
-          <a:prstGeom prst="rect">
-            <a:avLst/>
-          </a:prstGeom>
-          <a:solidFill>
-            <a:srgbClr val="0A1428"/>
-          </a:solidFill>
+            <a:ext cx="12191695" cy="6858000"/>
+          </a:xfrm>
+          <a:prstGeom prst="rect">
+            <a:avLst/>
+          </a:prstGeom>
+          <a:gradFill rotWithShape="1">
+            <a:gsLst>
+              <a:gs pos="0">
+                <a:srgbClr val="0A1428">
+                  <a:alpha val="88000"/>
+                </a:srgbClr>
+              </a:gs>
+              <a:gs pos="100000">
+                <a:srgbClr val="0A1428">
+                  <a:alpha val="18000"/>
+                </a:srgbClr>
+              </a:gs>
+            </a:gsLst>
+            <a:lin scaled="0" ang="0"/>
+          </a:gradFill>
           <a:ln>
             <a:noFill/>
           </a:ln>
